--- a/yunqi-2026-pai-forum/docs/洞察一页-08-从数据到真机：PAI Physical AI全栈开发工具.pptx
+++ b/yunqi-2026-pai-forum/docs/洞察一页-08-从数据到真机：PAI Physical AI全栈开发工具.pptx
@@ -3141,7 +3141,7 @@
         <p:spPr>
           <a:xfrm>
             <a:off x="0" y="0"/>
-            <a:ext cx="12191695" cy="1051560"/>
+            <a:ext cx="12191695" cy="1097280"/>
           </a:xfrm>
           <a:prstGeom prst="rect">
             <a:avLst/>
@@ -3183,8 +3183,8 @@
         </p:nvSpPr>
         <p:spPr>
           <a:xfrm>
-            <a:off x="365760" y="146304"/>
-            <a:ext cx="11430000" cy="274320"/>
+            <a:off x="320040" y="91440"/>
+            <a:ext cx="11521440" cy="237744"/>
           </a:xfrm>
           <a:prstGeom prst="rect">
             <a:avLst/>
@@ -3199,7 +3199,7 @@
           <a:p>
             <a:pPr algn="l"/>
             <a:r>
-              <a:rPr sz="1300" b="0">
+              <a:rPr sz="1200" b="0">
                 <a:solidFill>
                   <a:srgbClr val="6B6B6B"/>
                 </a:solidFill>
@@ -3219,8 +3219,8 @@
         </p:nvSpPr>
         <p:spPr>
           <a:xfrm>
-            <a:off x="365760" y="420624"/>
-            <a:ext cx="11430000" cy="502920"/>
+            <a:off x="320040" y="347472"/>
+            <a:ext cx="11521440" cy="658368"/>
           </a:xfrm>
           <a:prstGeom prst="rect">
             <a:avLst/>
@@ -3235,14 +3235,14 @@
           <a:p>
             <a:pPr algn="l"/>
             <a:r>
-              <a:rPr sz="2000" b="1">
+              <a:rPr sz="1600" b="1">
                 <a:solidFill>
                   <a:srgbClr val="1A1A1A"/>
                 </a:solidFill>
                 <a:latin typeface="Microsoft YaHei"/>
                 <a:ea typeface="Microsoft YaHei"/>
               </a:rPr>
-              <a:t>洞察：Physical AI全栈的主线是EgoX数据资产化、RoboX可验证训练、EAIEval可复…</a:t>
+              <a:t>洞察：Physical AI全栈的主线是EgoX数据资产化、RoboX可验证训练、EAIEval可复现评测三者闭合。</a:t>
             </a:r>
           </a:p>
         </p:txBody>
@@ -3255,8 +3255,8 @@
         </p:nvSpPr>
         <p:spPr>
           <a:xfrm>
-            <a:off x="320040" y="1207008"/>
-            <a:ext cx="11521440" cy="502920"/>
+            <a:off x="274320" y="1207008"/>
+            <a:ext cx="11612880" cy="749808"/>
           </a:xfrm>
           <a:prstGeom prst="rect">
             <a:avLst/>
@@ -3300,8 +3300,8 @@
         </p:nvSpPr>
         <p:spPr>
           <a:xfrm>
-            <a:off x="457200" y="1298448"/>
-            <a:ext cx="11247120" cy="365760"/>
+            <a:off x="411480" y="1261872"/>
+            <a:ext cx="11338560" cy="640080"/>
           </a:xfrm>
           <a:prstGeom prst="rect">
             <a:avLst/>
@@ -3316,14 +3316,14 @@
           <a:p>
             <a:pPr algn="l"/>
             <a:r>
-              <a:rPr sz="1300" b="1">
+              <a:rPr sz="1200" b="1">
                 <a:solidFill>
                   <a:srgbClr val="1A1A1A"/>
                 </a:solidFill>
                 <a:latin typeface="Microsoft YaHei"/>
                 <a:ea typeface="Microsoft YaHei"/>
               </a:rPr>
-              <a:t>一句话判断：黄俊系统介绍PAI Physical AI全栈工具链：PAI-EgoX、PAI-RoboX、PAI-EAIEval。指出当前迭代周期最大阻碍是数据—训练—评测—部署—真机工具链割裂。EgoX把多源采集加工成标准数据资产…</a:t>
+              <a:t>一句话判断：黄俊系统介绍PAI Physical AI全栈工具链：PAI-EgoX、PAI-RoboX、PAI-EAIEval。指出当前迭代周期最大阻碍是数据—训练—评测—部署—真机工具链割裂。</a:t>
             </a:r>
           </a:p>
         </p:txBody>
@@ -3336,8 +3336,8 @@
         </p:nvSpPr>
         <p:spPr>
           <a:xfrm>
-            <a:off x="320040" y="1874519"/>
-            <a:ext cx="3703320" cy="2606040"/>
+            <a:off x="274320" y="2084831"/>
+            <a:ext cx="3749039" cy="2267712"/>
           </a:xfrm>
           <a:prstGeom prst="rect">
             <a:avLst/>
@@ -3381,8 +3381,8 @@
         </p:nvSpPr>
         <p:spPr>
           <a:xfrm>
-            <a:off x="457200" y="2011679"/>
-            <a:ext cx="3429000" cy="320040"/>
+            <a:off x="402336" y="2176271"/>
+            <a:ext cx="3493007" cy="292608"/>
           </a:xfrm>
           <a:prstGeom prst="rect">
             <a:avLst/>
@@ -3397,14 +3397,14 @@
           <a:p>
             <a:pPr algn="l"/>
             <a:r>
-              <a:rPr sz="1500" b="1">
+              <a:rPr sz="1400" b="1">
                 <a:solidFill>
                   <a:srgbClr val="8B1A2B"/>
                 </a:solidFill>
                 <a:latin typeface="Microsoft YaHei"/>
                 <a:ea typeface="Microsoft YaHei"/>
               </a:rPr>
-              <a:t>01  痛点：工具链割裂拖垮Physi…</a:t>
+              <a:t>01  痛点</a:t>
             </a:r>
           </a:p>
         </p:txBody>
@@ -3417,8 +3417,8 @@
         </p:nvSpPr>
         <p:spPr>
           <a:xfrm>
-            <a:off x="484632" y="2377439"/>
-            <a:ext cx="3374136" cy="1965960"/>
+            <a:off x="402336" y="2487167"/>
+            <a:ext cx="3493007" cy="1764792"/>
           </a:xfrm>
           <a:prstGeom prst="rect">
             <a:avLst/>
@@ -3433,28 +3433,45 @@
           <a:p>
             <a:pPr algn="l">
               <a:spcAft>
-                <a:spcPts val="400"/>
+                <a:spcPts val="200"/>
               </a:spcAft>
             </a:pPr>
             <a:r>
-              <a:rPr sz="1200" b="1">
+              <a:rPr sz="1100" b="1">
                 <a:solidFill>
                   <a:srgbClr val="1A1A1A"/>
                 </a:solidFill>
                 <a:latin typeface="Microsoft YaHei"/>
                 <a:ea typeface="Microsoft YaHei"/>
               </a:rPr>
-              <a:t>五段链路：数据 → 训练 → 评测 → 部署 → 真机，段间用「重复集成 / 重复…</a:t>
+              <a:t>Physical AI竞争焦点已从单点模型转向全链路契约</a:t>
             </a:r>
           </a:p>
           <a:p>
             <a:pPr algn="l">
               <a:spcAft>
-                <a:spcPts val="400"/>
+                <a:spcPts val="200"/>
               </a:spcAft>
             </a:pPr>
             <a:r>
-              <a:rPr sz="1200" b="0">
+              <a:rPr sz="1100" b="0">
+                <a:solidFill>
+                  <a:srgbClr val="4A4A4A"/>
+                </a:solidFill>
+                <a:latin typeface="Microsoft YaHei"/>
+                <a:ea typeface="Microsoft YaHei"/>
+              </a:rPr>
+              <a:t>• 五段链路：数据 → 训练 → 评测 → 部署 → 真机，段间用「重复集成 / 重复调试 / 经验难复用」断裂。</a:t>
+            </a:r>
+          </a:p>
+          <a:p>
+            <a:pPr algn="l">
+              <a:spcAft>
+                <a:spcPts val="200"/>
+              </a:spcAft>
+            </a:pPr>
+            <a:r>
+              <a:rPr sz="1100" b="0">
                 <a:solidFill>
                   <a:srgbClr val="4A4A4A"/>
                 </a:solidFill>
@@ -3467,11 +3484,11 @@
           <a:p>
             <a:pPr algn="l">
               <a:spcAft>
-                <a:spcPts val="400"/>
+                <a:spcPts val="200"/>
               </a:spcAft>
             </a:pPr>
             <a:r>
-              <a:rPr sz="1200" b="0">
+              <a:rPr sz="1100" b="0">
                 <a:solidFill>
                   <a:srgbClr val="4A4A4A"/>
                 </a:solidFill>
@@ -3481,23 +3498,6 @@
               <a:t>• 训练侧：模型、SFT/RL与仿真环境接口分散，多源多本体难组合，RL吞吐与仿真性能受限。</a:t>
             </a:r>
           </a:p>
-          <a:p>
-            <a:pPr algn="l">
-              <a:spcAft>
-                <a:spcPts val="400"/>
-              </a:spcAft>
-            </a:pPr>
-            <a:r>
-              <a:rPr sz="1200" b="0">
-                <a:solidFill>
-                  <a:srgbClr val="4A4A4A"/>
-                </a:solidFill>
-                <a:latin typeface="Microsoft YaHei"/>
-                <a:ea typeface="Microsoft YaHei"/>
-              </a:rPr>
-              <a:t>• 评测/部署/真机：Benchmark繁多、标准与接口多样；模型与本体需定制适配，失败根因难溯源，新任务新本体重复搭建。</a:t>
-            </a:r>
-          </a:p>
         </p:txBody>
       </p:sp>
       <p:sp>
@@ -3508,8 +3508,8 @@
         </p:nvSpPr>
         <p:spPr>
           <a:xfrm>
-            <a:off x="4224528" y="1874519"/>
-            <a:ext cx="3703320" cy="2606040"/>
+            <a:off x="4187951" y="2084831"/>
+            <a:ext cx="3749039" cy="2267712"/>
           </a:xfrm>
           <a:prstGeom prst="rect">
             <a:avLst/>
@@ -3553,8 +3553,8 @@
         </p:nvSpPr>
         <p:spPr>
           <a:xfrm>
-            <a:off x="4361688" y="2011679"/>
-            <a:ext cx="3429000" cy="320040"/>
+            <a:off x="4315967" y="2176271"/>
+            <a:ext cx="3493007" cy="292608"/>
           </a:xfrm>
           <a:prstGeom prst="rect">
             <a:avLst/>
@@ -3569,14 +3569,14 @@
           <a:p>
             <a:pPr algn="l"/>
             <a:r>
-              <a:rPr sz="1500" b="1">
+              <a:rPr sz="1400" b="1">
                 <a:solidFill>
                   <a:srgbClr val="8B1A2B"/>
                 </a:solidFill>
                 <a:latin typeface="Microsoft YaHei"/>
                 <a:ea typeface="Microsoft YaHei"/>
               </a:rPr>
-              <a:t>02  EgoX：从原始采集到标准数据…</a:t>
+              <a:t>02  从原始采集到标准数据资产</a:t>
             </a:r>
           </a:p>
         </p:txBody>
@@ -3589,8 +3589,8 @@
         </p:nvSpPr>
         <p:spPr>
           <a:xfrm>
-            <a:off x="4389120" y="2377439"/>
-            <a:ext cx="3374136" cy="1965960"/>
+            <a:off x="4315967" y="2487167"/>
+            <a:ext cx="3493007" cy="1764792"/>
           </a:xfrm>
           <a:prstGeom prst="rect">
             <a:avLst/>
@@ -3605,69 +3605,69 @@
           <a:p>
             <a:pPr algn="l">
               <a:spcAft>
-                <a:spcPts val="400"/>
+                <a:spcPts val="200"/>
               </a:spcAft>
             </a:pPr>
             <a:r>
-              <a:rPr sz="1200" b="1">
+              <a:rPr sz="1100" b="1">
                 <a:solidFill>
                   <a:srgbClr val="1A1A1A"/>
                 </a:solidFill>
                 <a:latin typeface="Microsoft YaHei"/>
                 <a:ea typeface="Microsoft YaHei"/>
               </a:rPr>
-              <a:t>数据金字塔：真机 / UMI / Ego / 仿真+合成 / 通用数据分层供给。</a:t>
+              <a:t>数据产品应同时交付「标准Episode格式 + L0–L5门禁 + 版本化准入」，否则上层训练无法跨本体复用。</a:t>
             </a:r>
           </a:p>
           <a:p>
             <a:pPr algn="l">
               <a:spcAft>
-                <a:spcPts val="400"/>
+                <a:spcPts val="200"/>
               </a:spcAft>
             </a:pPr>
             <a:r>
-              <a:rPr sz="1200" b="0">
+              <a:rPr sz="1100" b="0">
                 <a:solidFill>
                   <a:srgbClr val="4A4A4A"/>
                 </a:solidFill>
                 <a:latin typeface="Microsoft YaHei"/>
                 <a:ea typeface="Microsoft YaHei"/>
               </a:rPr>
-              <a:t>• 统一处理Pipeline：真机多模日志对齐、UMI位姿/夹爪恢复与跨本体重定向、Ego视频切片到手部重建/时空融合/语义分割并导出Le…</a:t>
+              <a:t>• 数据金字塔：真机 / UMI / Ego / 仿真+合成 / 通用数据分层供给。</a:t>
             </a:r>
           </a:p>
           <a:p>
             <a:pPr algn="l">
               <a:spcAft>
-                <a:spcPts val="400"/>
+                <a:spcPts val="200"/>
               </a:spcAft>
             </a:pPr>
             <a:r>
-              <a:rPr sz="1200" b="0">
+              <a:rPr sz="1100" b="0">
                 <a:solidFill>
                   <a:srgbClr val="4A4A4A"/>
                 </a:solidFill>
                 <a:latin typeface="Microsoft YaHei"/>
                 <a:ea typeface="Microsoft YaHei"/>
               </a:rPr>
-              <a:t>• 质量评估L0–L5：输入自证、覆盖率、物理合理性、时序一致性、位姿/尺度、分段/语义/VLA映射；输出质量报告、数据版本与准入结果。</a:t>
+              <a:t>• 统一处理Pipeline：真机多模日志对齐、UMI位姿/夹爪恢复与跨本体重定向、Ego视频切片到手部重建/时空融合/语义分割并导出LeRobot、仿真并行Rollout、通用数据去重与配方</a:t>
             </a:r>
           </a:p>
           <a:p>
             <a:pPr algn="l">
               <a:spcAft>
-                <a:spcPts val="400"/>
+                <a:spcPts val="200"/>
               </a:spcAft>
             </a:pPr>
             <a:r>
-              <a:rPr sz="1200" b="0">
+              <a:rPr sz="1100" b="0">
                 <a:solidFill>
                   <a:srgbClr val="4A4A4A"/>
                 </a:solidFill>
                 <a:latin typeface="Microsoft YaHei"/>
                 <a:ea typeface="Microsoft YaHei"/>
               </a:rPr>
-              <a:t>• 底座：Ray / DataJuicer | Checkpoint | OSS / CPFS | PAI-DLC。</a:t>
+              <a:t>• 质量评估L0–L5：输入自证、覆盖率、物理合理性、时序一致性、位姿/尺度、分段/语义/VLA映射</a:t>
             </a:r>
           </a:p>
         </p:txBody>
@@ -3680,8 +3680,8 @@
         </p:nvSpPr>
         <p:spPr>
           <a:xfrm>
-            <a:off x="8129016" y="1874519"/>
-            <a:ext cx="3703320" cy="2606040"/>
+            <a:off x="8101582" y="2084831"/>
+            <a:ext cx="3749039" cy="2267712"/>
           </a:xfrm>
           <a:prstGeom prst="rect">
             <a:avLst/>
@@ -3725,8 +3725,8 @@
         </p:nvSpPr>
         <p:spPr>
           <a:xfrm>
-            <a:off x="8266176" y="2011679"/>
-            <a:ext cx="3429000" cy="320040"/>
+            <a:off x="8229598" y="2176271"/>
+            <a:ext cx="3493007" cy="292608"/>
           </a:xfrm>
           <a:prstGeom prst="rect">
             <a:avLst/>
@@ -3741,14 +3741,14 @@
           <a:p>
             <a:pPr algn="l"/>
             <a:r>
-              <a:rPr sz="1500" b="1">
+              <a:rPr sz="1400" b="1">
                 <a:solidFill>
                   <a:srgbClr val="8B1A2B"/>
                 </a:solidFill>
                 <a:latin typeface="Microsoft YaHei"/>
                 <a:ea typeface="Microsoft YaHei"/>
               </a:rPr>
-              <a:t>03  Ego管线：数据质量与处理效率…</a:t>
+              <a:t>03  数据质量与处理效率双提升</a:t>
             </a:r>
           </a:p>
         </p:txBody>
@@ -3761,8 +3761,8 @@
         </p:nvSpPr>
         <p:spPr>
           <a:xfrm>
-            <a:off x="8293608" y="2377439"/>
-            <a:ext cx="3374136" cy="1965960"/>
+            <a:off x="8229598" y="2487167"/>
+            <a:ext cx="3493007" cy="1764792"/>
           </a:xfrm>
           <a:prstGeom prst="rect">
             <a:avLst/>
@@ -3777,45 +3777,62 @@
           <a:p>
             <a:pPr algn="l">
               <a:spcAft>
-                <a:spcPts val="400"/>
+                <a:spcPts val="200"/>
               </a:spcAft>
             </a:pPr>
             <a:r>
-              <a:rPr sz="1200" b="1">
+              <a:rPr sz="1100" b="1">
                 <a:solidFill>
                   <a:srgbClr val="1A1A1A"/>
                 </a:solidFill>
                 <a:latin typeface="Microsoft YaHei"/>
                 <a:ea typeface="Microsoft YaHei"/>
               </a:rPr>
-              <a:t>支持ViPE/VITRA、鱼眼/针孔单双目等多相机；流程覆盖预检切片、视频空间理解…</a:t>
+              <a:t>Ego数据竞争力在「过滤无效帧 + 流式并行 + 手部一致性门禁」</a:t>
             </a:r>
           </a:p>
           <a:p>
             <a:pPr algn="l">
               <a:spcAft>
-                <a:spcPts val="400"/>
+                <a:spcPts val="200"/>
               </a:spcAft>
             </a:pPr>
             <a:r>
-              <a:rPr sz="1200" b="0">
+              <a:rPr sz="1100" b="0">
                 <a:solidFill>
                   <a:srgbClr val="4A4A4A"/>
                 </a:solidFill>
                 <a:latin typeface="Microsoft YaHei"/>
                 <a:ea typeface="Microsoft YaHei"/>
               </a:rPr>
-              <a:t>• 效率优化：无效数据预过滤、Index Clip稀疏采样与本地缓存、Ray Data流式DAG与ActorPool/GPU Fracti…</a:t>
+              <a:t>• 支持ViPE/VITRA、鱼眼/针孔单双目等多相机</a:t>
             </a:r>
           </a:p>
           <a:p>
             <a:pPr algn="l">
               <a:spcAft>
-                <a:spcPts val="400"/>
+                <a:spcPts val="200"/>
               </a:spcAft>
             </a:pPr>
             <a:r>
-              <a:rPr sz="1200" b="0">
+              <a:rPr sz="1100" b="0">
+                <a:solidFill>
+                  <a:srgbClr val="4A4A4A"/>
+                </a:solidFill>
+                <a:latin typeface="Microsoft YaHei"/>
+                <a:ea typeface="Microsoft YaHei"/>
+              </a:rPr>
+              <a:t>• 效率优化：无效数据预过滤、Index Clip稀疏采样与本地缓存、Ray Data流式DAG与ActorPool/GPU Fraction、固定帧窗流式重组消除全局屏障</a:t>
+            </a:r>
+          </a:p>
+          <a:p>
+            <a:pPr algn="l">
+              <a:spcAft>
+                <a:spcPts val="200"/>
+              </a:spcAft>
+            </a:pPr>
+            <a:r>
+              <a:rPr sz="1100" b="0">
                 <a:solidFill>
                   <a:srgbClr val="4A4A4A"/>
                 </a:solidFill>
@@ -3835,8 +3852,8 @@
         </p:nvSpPr>
         <p:spPr>
           <a:xfrm>
-            <a:off x="320040" y="4617720"/>
-            <a:ext cx="7315200" cy="256032"/>
+            <a:off x="274320" y="4553712"/>
+            <a:ext cx="7315200" cy="237744"/>
           </a:xfrm>
           <a:prstGeom prst="rect">
             <a:avLst/>
@@ -3851,7 +3868,7 @@
           <a:p>
             <a:pPr algn="l"/>
             <a:r>
-              <a:rPr sz="1400" b="1">
+              <a:rPr sz="1300" b="1">
                 <a:solidFill>
                   <a:srgbClr val="1A1A1A"/>
                 </a:solidFill>
@@ -3871,8 +3888,8 @@
         </p:nvSpPr>
         <p:spPr>
           <a:xfrm>
-            <a:off x="320040" y="4910328"/>
-            <a:ext cx="1847088" cy="868680"/>
+            <a:off x="274320" y="4809744"/>
+            <a:ext cx="1874519" cy="960120"/>
           </a:xfrm>
           <a:prstGeom prst="rect">
             <a:avLst/>
@@ -3916,8 +3933,8 @@
         </p:nvSpPr>
         <p:spPr>
           <a:xfrm>
-            <a:off x="429768" y="4965192"/>
-            <a:ext cx="1664208" cy="201168"/>
+            <a:off x="365760" y="4864608"/>
+            <a:ext cx="1709927" cy="201168"/>
           </a:xfrm>
           <a:prstGeom prst="rect">
             <a:avLst/>
@@ -3939,7 +3956,7 @@
                 <a:latin typeface="Microsoft YaHei"/>
                 <a:ea typeface="Microsoft YaHei"/>
               </a:rPr>
-              <a:t>痛点：工具链割裂拖垮P…</a:t>
+              <a:t>痛点</a:t>
             </a:r>
           </a:p>
         </p:txBody>
@@ -3952,8 +3969,8 @@
         </p:nvSpPr>
         <p:spPr>
           <a:xfrm>
-            <a:off x="429768" y="5166360"/>
-            <a:ext cx="1664208" cy="237744"/>
+            <a:off x="365760" y="5065776"/>
+            <a:ext cx="1709927" cy="256032"/>
           </a:xfrm>
           <a:prstGeom prst="rect">
             <a:avLst/>
@@ -3975,7 +3992,7 @@
                 <a:latin typeface="Microsoft YaHei"/>
                 <a:ea typeface="Microsoft YaHei"/>
               </a:rPr>
-              <a:t>五段链路：数据 → 训练 → …</a:t>
+              <a:t>核心口径</a:t>
             </a:r>
           </a:p>
         </p:txBody>
@@ -3988,8 +4005,8 @@
         </p:nvSpPr>
         <p:spPr>
           <a:xfrm>
-            <a:off x="429768" y="5413248"/>
-            <a:ext cx="1664208" cy="292608"/>
+            <a:off x="365760" y="5340096"/>
+            <a:ext cx="1709927" cy="365760"/>
           </a:xfrm>
           <a:prstGeom prst="rect">
             <a:avLst/>
@@ -4004,14 +4021,14 @@
           <a:p>
             <a:pPr algn="l"/>
             <a:r>
-              <a:rPr sz="1400" b="1">
+              <a:rPr sz="1200" b="1">
                 <a:solidFill>
                   <a:srgbClr val="8B1A2B"/>
                 </a:solidFill>
                 <a:latin typeface="Microsoft YaHei"/>
                 <a:ea typeface="Microsoft YaHei"/>
               </a:rPr>
-              <a:t>五段链路：数据 → 训练 …</a:t>
+              <a:t>五段链路：数据 → 训练 → 评测 → 部署 → 真机</a:t>
             </a:r>
           </a:p>
         </p:txBody>
@@ -4024,8 +4041,8 @@
         </p:nvSpPr>
         <p:spPr>
           <a:xfrm>
-            <a:off x="2276856" y="4910328"/>
-            <a:ext cx="1847088" cy="868680"/>
+            <a:off x="2240279" y="4809744"/>
+            <a:ext cx="1874519" cy="960120"/>
           </a:xfrm>
           <a:prstGeom prst="rect">
             <a:avLst/>
@@ -4069,8 +4086,8 @@
         </p:nvSpPr>
         <p:spPr>
           <a:xfrm>
-            <a:off x="2386584" y="4965192"/>
-            <a:ext cx="1664208" cy="201168"/>
+            <a:off x="2331719" y="4864608"/>
+            <a:ext cx="1709927" cy="201168"/>
           </a:xfrm>
           <a:prstGeom prst="rect">
             <a:avLst/>
@@ -4092,7 +4109,7 @@
                 <a:latin typeface="Microsoft YaHei"/>
                 <a:ea typeface="Microsoft YaHei"/>
               </a:rPr>
-              <a:t>EgoX：从原始采集到…</a:t>
+              <a:t>从原始采集到标准数据资产</a:t>
             </a:r>
           </a:p>
         </p:txBody>
@@ -4105,8 +4122,8 @@
         </p:nvSpPr>
         <p:spPr>
           <a:xfrm>
-            <a:off x="2386584" y="5166360"/>
-            <a:ext cx="1664208" cy="237744"/>
+            <a:off x="2331719" y="5065776"/>
+            <a:ext cx="1709927" cy="256032"/>
           </a:xfrm>
           <a:prstGeom prst="rect">
             <a:avLst/>
@@ -4128,7 +4145,7 @@
                 <a:latin typeface="Microsoft YaHei"/>
                 <a:ea typeface="Microsoft YaHei"/>
               </a:rPr>
-              <a:t>数据金字塔：真机 / UMI …</a:t>
+              <a:t>核心口径</a:t>
             </a:r>
           </a:p>
         </p:txBody>
@@ -4141,8 +4158,8 @@
         </p:nvSpPr>
         <p:spPr>
           <a:xfrm>
-            <a:off x="2386584" y="5413248"/>
-            <a:ext cx="1664208" cy="292608"/>
+            <a:off x="2331719" y="5340096"/>
+            <a:ext cx="1709927" cy="365760"/>
           </a:xfrm>
           <a:prstGeom prst="rect">
             <a:avLst/>
@@ -4157,14 +4174,14 @@
           <a:p>
             <a:pPr algn="l"/>
             <a:r>
-              <a:rPr sz="1400" b="1">
+              <a:rPr sz="1200" b="1">
                 <a:solidFill>
                   <a:srgbClr val="8B1A2B"/>
                 </a:solidFill>
                 <a:latin typeface="Microsoft YaHei"/>
                 <a:ea typeface="Microsoft YaHei"/>
               </a:rPr>
-              <a:t>数据金字塔：真机 / UM…</a:t>
+              <a:t>数据金字塔：真机 / UMI / Ego / 仿真+合成 / 通用数据分层供给。</a:t>
             </a:r>
           </a:p>
         </p:txBody>
@@ -4177,8 +4194,8 @@
         </p:nvSpPr>
         <p:spPr>
           <a:xfrm>
-            <a:off x="4233672" y="4910328"/>
-            <a:ext cx="1847088" cy="868680"/>
+            <a:off x="4206238" y="4809744"/>
+            <a:ext cx="1874519" cy="960120"/>
           </a:xfrm>
           <a:prstGeom prst="rect">
             <a:avLst/>
@@ -4222,8 +4239,8 @@
         </p:nvSpPr>
         <p:spPr>
           <a:xfrm>
-            <a:off x="4343400" y="4965192"/>
-            <a:ext cx="1664208" cy="201168"/>
+            <a:off x="4297678" y="4864608"/>
+            <a:ext cx="1709927" cy="201168"/>
           </a:xfrm>
           <a:prstGeom prst="rect">
             <a:avLst/>
@@ -4245,7 +4262,7 @@
                 <a:latin typeface="Microsoft YaHei"/>
                 <a:ea typeface="Microsoft YaHei"/>
               </a:rPr>
-              <a:t>Ego管线：数据质量与…</a:t>
+              <a:t>数据质量与处理效率双提升</a:t>
             </a:r>
           </a:p>
         </p:txBody>
@@ -4258,8 +4275,8 @@
         </p:nvSpPr>
         <p:spPr>
           <a:xfrm>
-            <a:off x="4343400" y="5166360"/>
-            <a:ext cx="1664208" cy="237744"/>
+            <a:off x="4297678" y="5065776"/>
+            <a:ext cx="1709927" cy="256032"/>
           </a:xfrm>
           <a:prstGeom prst="rect">
             <a:avLst/>
@@ -4281,7 +4298,7 @@
                 <a:latin typeface="Microsoft YaHei"/>
                 <a:ea typeface="Microsoft YaHei"/>
               </a:rPr>
-              <a:t>左手遮挡率下降约92.3%；右…</a:t>
+              <a:t>演讲口径</a:t>
             </a:r>
           </a:p>
         </p:txBody>
@@ -4294,8 +4311,8 @@
         </p:nvSpPr>
         <p:spPr>
           <a:xfrm>
-            <a:off x="4343400" y="5413248"/>
-            <a:ext cx="1664208" cy="292608"/>
+            <a:off x="4297678" y="5340096"/>
+            <a:ext cx="1709927" cy="365760"/>
           </a:xfrm>
           <a:prstGeom prst="rect">
             <a:avLst/>
@@ -4310,7 +4327,7 @@
           <a:p>
             <a:pPr algn="l"/>
             <a:r>
-              <a:rPr sz="1400" b="1">
+              <a:rPr sz="1200" b="1">
                 <a:solidFill>
                   <a:srgbClr val="8B1A2B"/>
                 </a:solidFill>
@@ -4330,8 +4347,8 @@
         </p:nvSpPr>
         <p:spPr>
           <a:xfrm>
-            <a:off x="6190488" y="4910328"/>
-            <a:ext cx="1847088" cy="868680"/>
+            <a:off x="6172197" y="4809744"/>
+            <a:ext cx="1874519" cy="960120"/>
           </a:xfrm>
           <a:prstGeom prst="rect">
             <a:avLst/>
@@ -4375,8 +4392,8 @@
         </p:nvSpPr>
         <p:spPr>
           <a:xfrm>
-            <a:off x="6300216" y="4965192"/>
-            <a:ext cx="1664208" cy="201168"/>
+            <a:off x="6263637" y="4864608"/>
+            <a:ext cx="1709927" cy="201168"/>
           </a:xfrm>
           <a:prstGeom prst="rect">
             <a:avLst/>
@@ -4398,7 +4415,7 @@
                 <a:latin typeface="Microsoft YaHei"/>
                 <a:ea typeface="Microsoft YaHei"/>
               </a:rPr>
-              <a:t>RoboX：把标准数据…</a:t>
+              <a:t>数据质量与处理效率双提升·2</a:t>
             </a:r>
           </a:p>
         </p:txBody>
@@ -4411,8 +4428,8 @@
         </p:nvSpPr>
         <p:spPr>
           <a:xfrm>
-            <a:off x="6300216" y="5166360"/>
-            <a:ext cx="1664208" cy="237744"/>
+            <a:off x="6263637" y="5065776"/>
+            <a:ext cx="1709927" cy="256032"/>
           </a:xfrm>
           <a:prstGeom prst="rect">
             <a:avLst/>
@@ -4434,7 +4451,7 @@
                 <a:latin typeface="Microsoft YaHei"/>
                 <a:ea typeface="Microsoft YaHei"/>
               </a:rPr>
-              <a:t>监督学习/模仿学习：可插拔Ba…</a:t>
+              <a:t>演讲口径</a:t>
             </a:r>
           </a:p>
         </p:txBody>
@@ -4447,8 +4464,8 @@
         </p:nvSpPr>
         <p:spPr>
           <a:xfrm>
-            <a:off x="6300216" y="5413248"/>
-            <a:ext cx="1664208" cy="292608"/>
+            <a:off x="6263637" y="5340096"/>
+            <a:ext cx="1709927" cy="365760"/>
           </a:xfrm>
           <a:prstGeom prst="rect">
             <a:avLst/>
@@ -4463,14 +4480,14 @@
           <a:p>
             <a:pPr algn="l"/>
             <a:r>
-              <a:rPr sz="1400" b="1">
+              <a:rPr sz="1200" b="1">
                 <a:solidFill>
                   <a:srgbClr val="8B1A2B"/>
                 </a:solidFill>
                 <a:latin typeface="Microsoft YaHei"/>
                 <a:ea typeface="Microsoft YaHei"/>
               </a:rPr>
-              <a:t>监督学习/模仿学习：可插拔…</a:t>
+              <a:t>左手遮挡率下降约92.3%；右手遮挡率下降约95.2%</a:t>
             </a:r>
           </a:p>
         </p:txBody>
@@ -4483,8 +4500,8 @@
         </p:nvSpPr>
         <p:spPr>
           <a:xfrm>
-            <a:off x="8147304" y="4910328"/>
-            <a:ext cx="1847088" cy="868680"/>
+            <a:off x="8138156" y="4809744"/>
+            <a:ext cx="1874519" cy="960120"/>
           </a:xfrm>
           <a:prstGeom prst="rect">
             <a:avLst/>
@@ -4528,8 +4545,8 @@
         </p:nvSpPr>
         <p:spPr>
           <a:xfrm>
-            <a:off x="8257032" y="4965192"/>
-            <a:ext cx="1664208" cy="201168"/>
+            <a:off x="8229596" y="4864608"/>
+            <a:ext cx="1709927" cy="201168"/>
           </a:xfrm>
           <a:prstGeom prst="rect">
             <a:avLst/>
@@ -4551,7 +4568,7 @@
                 <a:latin typeface="Microsoft YaHei"/>
                 <a:ea typeface="Microsoft YaHei"/>
               </a:rPr>
-              <a:t>RoboX RL：多任…</a:t>
+              <a:t>数据质量与处理效率双提升·3</a:t>
             </a:r>
           </a:p>
         </p:txBody>
@@ -4564,8 +4581,8 @@
         </p:nvSpPr>
         <p:spPr>
           <a:xfrm>
-            <a:off x="8257032" y="5166360"/>
-            <a:ext cx="1664208" cy="237744"/>
+            <a:off x="8229596" y="5065776"/>
+            <a:ext cx="1709927" cy="256032"/>
           </a:xfrm>
           <a:prstGeom prst="rect">
             <a:avLst/>
@@ -4587,7 +4604,7 @@
                 <a:latin typeface="Microsoft YaHei"/>
                 <a:ea typeface="Microsoft YaHei"/>
               </a:rPr>
-              <a:t>端到端训练速度约3.8×（SI…</a:t>
+              <a:t>演讲口径</a:t>
             </a:r>
           </a:p>
         </p:txBody>
@@ -4600,8 +4617,8 @@
         </p:nvSpPr>
         <p:spPr>
           <a:xfrm>
-            <a:off x="8257032" y="5413248"/>
-            <a:ext cx="1664208" cy="292608"/>
+            <a:off x="8229596" y="5340096"/>
+            <a:ext cx="1709927" cy="365760"/>
           </a:xfrm>
           <a:prstGeom prst="rect">
             <a:avLst/>
@@ -4616,14 +4633,14 @@
           <a:p>
             <a:pPr algn="l"/>
             <a:r>
-              <a:rPr sz="1400" b="1">
+              <a:rPr sz="1200" b="1">
                 <a:solidFill>
                   <a:srgbClr val="8B1A2B"/>
                 </a:solidFill>
                 <a:latin typeface="Microsoft YaHei"/>
                 <a:ea typeface="Microsoft YaHei"/>
               </a:rPr>
-              <a:t>端到端训练速度约3.8×（SIMP…</a:t>
+              <a:t>重投影中位误差下降约66.7%；长尾误差下降约89.4%</a:t>
             </a:r>
           </a:p>
         </p:txBody>
@@ -4636,8 +4653,8 @@
         </p:nvSpPr>
         <p:spPr>
           <a:xfrm>
-            <a:off x="10104120" y="4910328"/>
-            <a:ext cx="1847088" cy="868680"/>
+            <a:off x="10104115" y="4809744"/>
+            <a:ext cx="1874519" cy="960120"/>
           </a:xfrm>
           <a:prstGeom prst="rect">
             <a:avLst/>
@@ -4681,8 +4698,8 @@
         </p:nvSpPr>
         <p:spPr>
           <a:xfrm>
-            <a:off x="10213848" y="4965192"/>
-            <a:ext cx="1664208" cy="201168"/>
+            <a:off x="10195555" y="4864608"/>
+            <a:ext cx="1709927" cy="201168"/>
           </a:xfrm>
           <a:prstGeom prst="rect">
             <a:avLst/>
@@ -4704,7 +4721,7 @@
                 <a:latin typeface="Microsoft YaHei"/>
                 <a:ea typeface="Microsoft YaHei"/>
               </a:rPr>
-              <a:t>PAI-EAIEval…</a:t>
+              <a:t>RoboX</a:t>
             </a:r>
           </a:p>
         </p:txBody>
@@ -4717,8 +4734,8 @@
         </p:nvSpPr>
         <p:spPr>
           <a:xfrm>
-            <a:off x="10213848" y="5166360"/>
-            <a:ext cx="1664208" cy="237744"/>
+            <a:off x="10195555" y="5065776"/>
+            <a:ext cx="1709927" cy="256032"/>
           </a:xfrm>
           <a:prstGeom prst="rect">
             <a:avLst/>
@@ -4740,7 +4757,7 @@
                 <a:latin typeface="Microsoft YaHei"/>
                 <a:ea typeface="Microsoft YaHei"/>
               </a:rPr>
-              <a:t>不可变运行契约：Model A…</a:t>
+              <a:t>核心口径</a:t>
             </a:r>
           </a:p>
         </p:txBody>
@@ -4753,8 +4770,8 @@
         </p:nvSpPr>
         <p:spPr>
           <a:xfrm>
-            <a:off x="10213848" y="5413248"/>
-            <a:ext cx="1664208" cy="292608"/>
+            <a:off x="10195555" y="5340096"/>
+            <a:ext cx="1709927" cy="365760"/>
           </a:xfrm>
           <a:prstGeom prst="rect">
             <a:avLst/>
@@ -4769,14 +4786,14 @@
           <a:p>
             <a:pPr algn="l"/>
             <a:r>
-              <a:rPr sz="1400" b="1">
+              <a:rPr sz="1200" b="1">
                 <a:solidFill>
                   <a:srgbClr val="8B1A2B"/>
                 </a:solidFill>
                 <a:latin typeface="Microsoft YaHei"/>
                 <a:ea typeface="Microsoft YaHei"/>
               </a:rPr>
-              <a:t>不可变运行契约：Model…</a:t>
+              <a:t>监督学习/模仿学习：可插拔Backbone（VLM/WM）与Head（自回归序列头、并行回归头、Diffusion动作专家）；CPT/SFT/多模混合/跨本体训练；统一Trainer对接DeepSpeed/FSDP/HSDP/Megatron。</a:t>
             </a:r>
           </a:p>
         </p:txBody>
@@ -4789,8 +4806,8 @@
         </p:nvSpPr>
         <p:spPr>
           <a:xfrm>
-            <a:off x="0" y="5989320"/>
-            <a:ext cx="12191695" cy="868680"/>
+            <a:off x="0" y="5870448"/>
+            <a:ext cx="12191695" cy="987552"/>
           </a:xfrm>
           <a:prstGeom prst="rect">
             <a:avLst/>
@@ -4832,8 +4849,8 @@
         </p:nvSpPr>
         <p:spPr>
           <a:xfrm>
-            <a:off x="365760" y="6080760"/>
-            <a:ext cx="11430000" cy="256032"/>
+            <a:off x="320040" y="5943600"/>
+            <a:ext cx="11521440" cy="502920"/>
           </a:xfrm>
           <a:prstGeom prst="rect">
             <a:avLst/>
@@ -4848,14 +4865,14 @@
           <a:p>
             <a:pPr algn="l"/>
             <a:r>
-              <a:rPr sz="1200" b="1">
+              <a:rPr sz="1100" b="1">
                 <a:solidFill>
                   <a:srgbClr val="1A1A1A"/>
                 </a:solidFill>
                 <a:latin typeface="Microsoft YaHei"/>
                 <a:ea typeface="Microsoft YaHei"/>
               </a:rPr>
-              <a:t>可落地动作：Physical AI全栈的主线是EgoX数据资产化、RoboX可验证训练、EAIEval可复现评测三者闭合。；工具链割裂的代价是重复集成/调试与经验不可复用；统一协议与版本化契约是跨本体规模化的前提。</a:t>
+              <a:t>可落地动作：Physical AI全栈的主线是EgoX数据资产化、RoboX可验证训练、EAIEval可复现评测三者闭合；工具链割裂的代价是重复集成/调试与经验不可复用；统一协议与版本化契约是跨本体规模化的前提；友商可对标建设：数据L0–L5门禁、统一策略模型协议、模型池与仿真池解耦的高并行评测。</a:t>
             </a:r>
           </a:p>
         </p:txBody>
@@ -4868,8 +4885,8 @@
         </p:nvSpPr>
         <p:spPr>
           <a:xfrm>
-            <a:off x="365760" y="6373368"/>
-            <a:ext cx="11430000" cy="256032"/>
+            <a:off x="320040" y="6437376"/>
+            <a:ext cx="11521440" cy="256032"/>
           </a:xfrm>
           <a:prstGeom prst="rect">
             <a:avLst/>
@@ -4884,7 +4901,7 @@
           <a:p>
             <a:pPr algn="l"/>
             <a:r>
-              <a:rPr sz="1000" b="0">
+              <a:rPr sz="900" b="0">
                 <a:solidFill>
                   <a:srgbClr val="6B6B6B"/>
                 </a:solidFill>
@@ -5126,7 +5143,7 @@
         <p:spPr>
           <a:xfrm>
             <a:off x="429768" y="1143000"/>
-            <a:ext cx="3496970" cy="292608"/>
+            <a:ext cx="3496970" cy="384048"/>
           </a:xfrm>
           <a:prstGeom prst="rect">
             <a:avLst/>
@@ -5148,7 +5165,7 @@
                 <a:latin typeface="Microsoft YaHei"/>
                 <a:ea typeface="Microsoft YaHei"/>
               </a:rPr>
-              <a:t>痛点：工具链割裂拖垮Physical …</a:t>
+              <a:t>工具链割裂拖垮Physical AI迭代周期</a:t>
             </a:r>
           </a:p>
         </p:txBody>
@@ -5169,7 +5186,7 @@
         </p:blipFill>
         <p:spPr>
           <a:xfrm>
-            <a:off x="429768" y="1928092"/>
+            <a:off x="429768" y="1946380"/>
             <a:ext cx="3496970" cy="2965239"/>
           </a:xfrm>
           <a:prstGeom prst="rect">
@@ -5267,7 +5284,7 @@
         <p:spPr>
           <a:xfrm>
             <a:off x="4347362" y="1143000"/>
-            <a:ext cx="3496970" cy="292608"/>
+            <a:ext cx="3496970" cy="384048"/>
           </a:xfrm>
           <a:prstGeom prst="rect">
             <a:avLst/>
@@ -5289,7 +5306,7 @@
                 <a:latin typeface="Microsoft YaHei"/>
                 <a:ea typeface="Microsoft YaHei"/>
               </a:rPr>
-              <a:t>EgoX：从原始采集到标准数据资产</a:t>
+              <a:t>从原始采集到标准数据资产</a:t>
             </a:r>
           </a:p>
         </p:txBody>
@@ -5310,7 +5327,7 @@
         </p:blipFill>
         <p:spPr>
           <a:xfrm>
-            <a:off x="4347362" y="1928092"/>
+            <a:off x="4347362" y="1946380"/>
             <a:ext cx="3496970" cy="2965239"/>
           </a:xfrm>
           <a:prstGeom prst="rect">
@@ -5408,7 +5425,7 @@
         <p:spPr>
           <a:xfrm>
             <a:off x="8264956" y="1143000"/>
-            <a:ext cx="3496970" cy="292608"/>
+            <a:ext cx="3496970" cy="384048"/>
           </a:xfrm>
           <a:prstGeom prst="rect">
             <a:avLst/>
@@ -5430,7 +5447,7 @@
                 <a:latin typeface="Microsoft YaHei"/>
                 <a:ea typeface="Microsoft YaHei"/>
               </a:rPr>
-              <a:t>管线效率约+44%</a:t>
+              <a:t>管线效率约+44% · 左手遮挡率下降约92.3%；</a:t>
             </a:r>
           </a:p>
         </p:txBody>
@@ -5451,7 +5468,7 @@
         </p:blipFill>
         <p:spPr>
           <a:xfrm>
-            <a:off x="8264956" y="1928092"/>
+            <a:off x="8264956" y="1946380"/>
             <a:ext cx="3496970" cy="2965239"/>
           </a:xfrm>
           <a:prstGeom prst="rect">

--- a/yunqi-2026-pai-forum/docs/洞察一页-08-从数据到真机：PAI Physical AI全栈开发工具.pptx
+++ b/yunqi-2026-pai-forum/docs/洞察一页-08-从数据到真机：PAI Physical AI全栈开发工具.pptx
@@ -3323,7 +3323,7 @@
                 <a:latin typeface="Microsoft YaHei"/>
                 <a:ea typeface="Microsoft YaHei"/>
               </a:rPr>
-              <a:t>一句话判断：黄俊系统介绍PAI Physical AI全栈工具链：PAI-EgoX、PAI-RoboX、PAI-EAIEval。指出当前迭代周期最大阻碍是数据—训练—评测—部署—真机工具链割裂。</a:t>
+              <a:t>一句话判断：阿里云 Physical AI / PAI——PAI-EgoX、PAI-RoboX、PAI-EAIEval。指出当前迭代周期最大阻碍是数据—训练—评测—部署—真机工具链割裂。</a:t>
             </a:r>
           </a:p>
         </p:txBody>
@@ -3956,7 +3956,7 @@
                 <a:latin typeface="Microsoft YaHei"/>
                 <a:ea typeface="Microsoft YaHei"/>
               </a:rPr>
-              <a:t>痛点</a:t>
+              <a:t>管线效率</a:t>
             </a:r>
           </a:p>
         </p:txBody>
@@ -3992,7 +3992,7 @@
                 <a:latin typeface="Microsoft YaHei"/>
                 <a:ea typeface="Microsoft YaHei"/>
               </a:rPr>
-              <a:t>核心口径</a:t>
+              <a:t>数据质量与处理效率双提升</a:t>
             </a:r>
           </a:p>
         </p:txBody>
@@ -4028,7 +4028,7 @@
                 <a:latin typeface="Microsoft YaHei"/>
                 <a:ea typeface="Microsoft YaHei"/>
               </a:rPr>
-              <a:t>五段链路：数据 → 训练 → 评测 → 部署 → 真机</a:t>
+              <a:t>约+44%</a:t>
             </a:r>
           </a:p>
         </p:txBody>
@@ -4109,7 +4109,7 @@
                 <a:latin typeface="Microsoft YaHei"/>
                 <a:ea typeface="Microsoft YaHei"/>
               </a:rPr>
-              <a:t>从原始采集到标准数据资产</a:t>
+              <a:t>编排/推理/仿真独立扩展</a:t>
             </a:r>
           </a:p>
         </p:txBody>
@@ -4145,7 +4145,7 @@
                 <a:latin typeface="Microsoft YaHei"/>
                 <a:ea typeface="Microsoft YaHei"/>
               </a:rPr>
-              <a:t>核心口径</a:t>
+              <a:t>关键能力</a:t>
             </a:r>
           </a:p>
         </p:txBody>
@@ -4181,7 +4181,7 @@
                 <a:latin typeface="Microsoft YaHei"/>
                 <a:ea typeface="Microsoft YaHei"/>
               </a:rPr>
-              <a:t>数据金字塔：真机 / UMI / Ego / 仿真+合成 / 通用数据分层供给。</a:t>
+              <a:t>耗时约30.5分钟</a:t>
             </a:r>
           </a:p>
         </p:txBody>
@@ -4262,7 +4262,7 @@
                 <a:latin typeface="Microsoft YaHei"/>
                 <a:ea typeface="Microsoft YaHei"/>
               </a:rPr>
-              <a:t>数据质量与处理效率双提升</a:t>
+              <a:t>并行效率</a:t>
             </a:r>
           </a:p>
         </p:txBody>
@@ -4298,7 +4298,7 @@
                 <a:latin typeface="Microsoft YaHei"/>
                 <a:ea typeface="Microsoft YaHei"/>
               </a:rPr>
-              <a:t>演讲口径</a:t>
+              <a:t>编排/推理/仿真独立扩展</a:t>
             </a:r>
           </a:p>
         </p:txBody>
@@ -4334,7 +4334,7 @@
                 <a:latin typeface="Microsoft YaHei"/>
                 <a:ea typeface="Microsoft YaHei"/>
               </a:rPr>
-              <a:t>管线效率约+44%</a:t>
+              <a:t>约95.4%</a:t>
             </a:r>
           </a:p>
         </p:txBody>
@@ -4415,7 +4415,7 @@
                 <a:latin typeface="Microsoft YaHei"/>
                 <a:ea typeface="Microsoft YaHei"/>
               </a:rPr>
-              <a:t>数据质量与处理效率双提升·2</a:t>
+              <a:t>有效并行度</a:t>
             </a:r>
           </a:p>
         </p:txBody>
@@ -4451,7 +4451,7 @@
                 <a:latin typeface="Microsoft YaHei"/>
                 <a:ea typeface="Microsoft YaHei"/>
               </a:rPr>
-              <a:t>演讲口径</a:t>
+              <a:t>编排/推理/仿真独立扩展</a:t>
             </a:r>
           </a:p>
         </p:txBody>
@@ -4487,7 +4487,7 @@
                 <a:latin typeface="Microsoft YaHei"/>
                 <a:ea typeface="Microsoft YaHei"/>
               </a:rPr>
-              <a:t>左手遮挡率下降约92.3%；右手遮挡率下降约95.2%</a:t>
+              <a:t>约68.7×</a:t>
             </a:r>
           </a:p>
         </p:txBody>
@@ -4568,7 +4568,7 @@
                 <a:latin typeface="Microsoft YaHei"/>
                 <a:ea typeface="Microsoft YaHei"/>
               </a:rPr>
-              <a:t>数据质量与处理效率双提升·3</a:t>
+              <a:t>RoboX RL</a:t>
             </a:r>
           </a:p>
         </p:txBody>
@@ -4604,7 +4604,7 @@
                 <a:latin typeface="Microsoft YaHei"/>
                 <a:ea typeface="Microsoft YaHei"/>
               </a:rPr>
-              <a:t>演讲口径</a:t>
+              <a:t>关键能力</a:t>
             </a:r>
           </a:p>
         </p:txBody>
@@ -4640,7 +4640,7 @@
                 <a:latin typeface="Microsoft YaHei"/>
                 <a:ea typeface="Microsoft YaHei"/>
               </a:rPr>
-              <a:t>重投影中位误差下降约66.7%；长尾误差下降约89.4%</a:t>
+              <a:t>端到端训练速度约3.8×（SIMPLE基准）</a:t>
             </a:r>
           </a:p>
         </p:txBody>
@@ -4721,7 +4721,7 @@
                 <a:latin typeface="Microsoft YaHei"/>
                 <a:ea typeface="Microsoft YaHei"/>
               </a:rPr>
-              <a:t>RoboX</a:t>
+              <a:t>RoboX RL</a:t>
             </a:r>
           </a:p>
         </p:txBody>
@@ -4757,7 +4757,7 @@
                 <a:latin typeface="Microsoft YaHei"/>
                 <a:ea typeface="Microsoft YaHei"/>
               </a:rPr>
-              <a:t>核心口径</a:t>
+              <a:t>关键能力</a:t>
             </a:r>
           </a:p>
         </p:txBody>
@@ -4793,7 +4793,7 @@
                 <a:latin typeface="Microsoft YaHei"/>
                 <a:ea typeface="Microsoft YaHei"/>
               </a:rPr>
-              <a:t>监督学习/模仿学习：可插拔Backbone（VLM/WM）与Head（自回归序列头、并行回归头、Diffusion动作专家）；CPT/SFT/多模混合/跨本体训练；统一Trainer对接DeepSpeed/FSDP/HSDP/Megatron。</a:t>
+              <a:t>仿真+Rollout吞吐约6×（SIMPLE基准）</a:t>
             </a:r>
           </a:p>
         </p:txBody>
@@ -4872,7 +4872,7 @@
                 <a:latin typeface="Microsoft YaHei"/>
                 <a:ea typeface="Microsoft YaHei"/>
               </a:rPr>
-              <a:t>可落地动作：Physical AI全栈的主线是EgoX数据资产化、RoboX可验证训练、EAIEval可复现评测三者闭合；工具链割裂的代价是重复集成/调试与经验不可复用；统一协议与版本化契约是跨本体规模化的前提；友商可对标建设：数据L0–L5门禁、统一策略模型协议、模型池与仿真池解耦的高并行评测。</a:t>
+              <a:t>启示要点：Physical AI全栈的主线是EgoX数据资产化、RoboX可验证训练、EAIEval可复现评测三者闭合；工具链割裂的代价是重复集成/调试与经验不可复用；统一协议与版本化契约是跨本体规模化的前提；</a:t>
             </a:r>
           </a:p>
         </p:txBody>

--- a/yunqi-2026-pai-forum/docs/洞察一页-08-从数据到真机：PAI Physical AI全栈开发工具.pptx
+++ b/yunqi-2026-pai-forum/docs/洞察一页-08-从数据到真机：PAI Physical AI全栈开发工具.pptx
@@ -3323,7 +3323,7 @@
                 <a:latin typeface="Microsoft YaHei"/>
                 <a:ea typeface="Microsoft YaHei"/>
               </a:rPr>
-              <a:t>一句话判断：阿里云 Physical AI / PAI——PAI-EgoX、PAI-RoboX、PAI-EAIEval。指出当前迭代周期最大阻碍是数据—训练—评测—部署—真机工具链割裂。</a:t>
+              <a:t>一句话判断：阿里云 Physical AI / PAI——PAI-EgoX、PAI-RoboX、PAI-EAIEval。当前迭代周期最大阻碍是数据—训练—评测—部署—真机工具链割裂。</a:t>
             </a:r>
           </a:p>
         </p:txBody>

--- a/yunqi-2026-pai-forum/docs/洞察一页-08-从数据到真机：PAI Physical AI全栈开发工具.pptx
+++ b/yunqi-2026-pai-forum/docs/洞察一页-08-从数据到真机：PAI Physical AI全栈开发工具.pptx
@@ -4872,7 +4872,7 @@
                 <a:latin typeface="Microsoft YaHei"/>
                 <a:ea typeface="Microsoft YaHei"/>
               </a:rPr>
-              <a:t>启示要点：Physical AI全栈的主线是EgoX数据资产化、RoboX可验证训练、EAIEval可复现评测三者闭合；工具链割裂的代价是重复集成/调试与经验不可复用；统一协议与版本化契约是跨本体规模化的前提；</a:t>
+              <a:t>启示要点：Physical AI全栈的主线是EgoX数据资产化、RoboX可验证训练、EAIEval可复现评测三者闭合；工具链割裂的代价是重复集成/调试与经验不可复用；统一协议与版本化契约是跨本体规模化的前提。</a:t>
             </a:r>
           </a:p>
         </p:txBody>
